--- a/output_poi_test.pptx
+++ b/output_poi_test.pptx
@@ -9366,13 +9366,6 @@
         <p:txBody>
           <a:bodyPr rtlCol="0"/>
           <a:lstStyle/>
-          <a:p>
-            <a:r>
-              <a:rPr lang="en-US"/>
-              <a:t>[Zone PICTURE]
-Cliquez pour insérer</a:t>
-            </a:r>
-          </a:p>
         </p:txBody>
       </p:sp>
     </p:spTree>
@@ -9630,13 +9623,6 @@
         <p:txBody>
           <a:bodyPr rtlCol="0"/>
           <a:lstStyle/>
-          <a:p>
-            <a:r>
-              <a:rPr lang="en-US"/>
-              <a:t>[Zone PICTURE]
-Cliquez pour insérer</a:t>
-            </a:r>
-          </a:p>
         </p:txBody>
       </p:sp>
       <p:sp xmlns:r="http://schemas.openxmlformats.org/officeDocument/2006/relationships">
@@ -9816,13 +9802,6 @@
         <p:txBody>
           <a:bodyPr rtlCol="0"/>
           <a:lstStyle/>
-          <a:p>
-            <a:r>
-              <a:rPr lang="en-US"/>
-              <a:t>[Zone PICTURE]
-Cliquez pour insérer</a:t>
-            </a:r>
-          </a:p>
         </p:txBody>
       </p:sp>
     </p:spTree>
@@ -10165,13 +10144,6 @@
         <p:txBody>
           <a:bodyPr rtlCol="0"/>
           <a:lstStyle/>
-          <a:p>
-            <a:r>
-              <a:rPr lang="en-US"/>
-              <a:t>[Zone PICTURE]
-Cliquez pour insérer</a:t>
-            </a:r>
-          </a:p>
         </p:txBody>
       </p:sp>
     </p:spTree>
@@ -10266,13 +10238,6 @@
         <p:txBody>
           <a:bodyPr rtlCol="0"/>
           <a:lstStyle/>
-          <a:p>
-            <a:r>
-              <a:rPr lang="en-US"/>
-              <a:t>[Zone PICTURE]
-Cliquez pour insérer</a:t>
-            </a:r>
-          </a:p>
         </p:txBody>
       </p:sp>
       <p:sp xmlns:r="http://schemas.openxmlformats.org/officeDocument/2006/relationships">
@@ -10439,13 +10404,6 @@
         <p:txBody>
           <a:bodyPr rtlCol="0"/>
           <a:lstStyle/>
-          <a:p>
-            <a:r>
-              <a:rPr lang="en-US"/>
-              <a:t>[Zone PICTURE]
-Cliquez pour insérer</a:t>
-            </a:r>
-          </a:p>
         </p:txBody>
       </p:sp>
     </p:spTree>
@@ -10695,13 +10653,6 @@
         <p:txBody>
           <a:bodyPr rtlCol="0"/>
           <a:lstStyle/>
-          <a:p>
-            <a:r>
-              <a:rPr lang="en-US"/>
-              <a:t>[Zone PICTURE]
-Cliquez pour insérer</a:t>
-            </a:r>
-          </a:p>
         </p:txBody>
       </p:sp>
     </p:spTree>
